--- a/classes/parte-4-seguridad-de-aplicaciones-web/103-ataques-y-seguridad-de-jwt/clase-103-presentacion.pptx
+++ b/classes/parte-4-seguridad-de-aplicaciones-web/103-ataques-y-seguridad-de-jwt/clase-103-presentacion.pptx
@@ -17,6 +17,9 @@
     <p:sldId id="265" r:id="rId16"/>
     <p:sldId id="266" r:id="rId17"/>
     <p:sldId id="267" r:id="rId18"/>
+    <p:sldId id="268" r:id="rId19"/>
+    <p:sldId id="269" r:id="rId20"/>
+    <p:sldId id="270" r:id="rId21"/>
   </p:sldIdLst>
   <p:sldSz cx="9144000" cy="6858000" type="screen4x3"/>
   <p:notesSz cx="6858000" cy="9144000"/>
@@ -3198,7 +3201,7 @@
                   <a:srgbClr val="0B3D2E"/>
                 </a:solidFill>
               </a:rPr>
-              <a:t>⚠️ Errores comunes</a:t>
+              <a:t>✍️ Ejercicios</a:t>
             </a:r>
           </a:p>
         </p:txBody>
@@ -3236,67 +3239,82 @@
                   <a:srgbClr val="22282E"/>
                 </a:solidFill>
               </a:rPr>
-              <a:t>•  alg:none rechazado — Servidor valida el algoritmo; prueba otro ataque</a:t>
-            </a:r>
-          </a:p>
-          <a:p>
-            <a:pPr>
-              <a:spcAft>
-                <a:spcPts val="600"/>
-              </a:spcAft>
-            </a:pPr>
-            <a:r>
-              <a:rPr sz="1500">
-                <a:solidFill>
-                  <a:srgbClr val="22282E"/>
-                </a:solidFill>
-              </a:rPr>
-              <a:t>•  Confusión no funciona — La librería fija el alg; documenta como fortaleza</a:t>
-            </a:r>
-          </a:p>
-          <a:p>
-            <a:pPr>
-              <a:spcAft>
-                <a:spcPts val="600"/>
-              </a:spcAft>
-            </a:pPr>
-            <a:r>
-              <a:rPr sz="1500">
-                <a:solidFill>
-                  <a:srgbClr val="22282E"/>
-                </a:solidFill>
-              </a:rPr>
-              <a:t>•  hashcat no crackea — Secreto fuerte; solo funciona con claves débiles</a:t>
-            </a:r>
-          </a:p>
-          <a:p>
-            <a:pPr>
-              <a:spcAft>
-                <a:spcPts val="600"/>
-              </a:spcAft>
-            </a:pPr>
-            <a:r>
-              <a:rPr sz="1500">
-                <a:solidFill>
-                  <a:srgbClr val="22282E"/>
-                </a:solidFill>
-              </a:rPr>
-              <a:t>•  Token modificado rechazado — La firma sí se verifica; revisa el vector</a:t>
-            </a:r>
-          </a:p>
-          <a:p>
-            <a:pPr>
-              <a:spcAft>
-                <a:spcPts val="600"/>
-              </a:spcAft>
-            </a:pPr>
-            <a:r>
-              <a:rPr sz="1500">
-                <a:solidFill>
-                  <a:srgbClr val="22282E"/>
-                </a:solidFill>
-              </a:rPr>
-              <a:t>•  kid no explotable — Se valida contra allowlist; correcto</a:t>
+              <a:t>•  Explica cada parte de un JWT y qué contiene el payload.</a:t>
+            </a:r>
+          </a:p>
+          <a:p>
+            <a:pPr>
+              <a:spcAft>
+                <a:spcPts val="600"/>
+              </a:spcAft>
+            </a:pPr>
+            <a:r>
+              <a:rPr sz="1500">
+                <a:solidFill>
+                  <a:srgbClr val="22282E"/>
+                </a:solidFill>
+              </a:rPr>
+              <a:t>•  Reproduce el ataque alg:none en un lab de PortSwigger.</a:t>
+            </a:r>
+          </a:p>
+          <a:p>
+            <a:pPr>
+              <a:spcAft>
+                <a:spcPts val="600"/>
+              </a:spcAft>
+            </a:pPr>
+            <a:r>
+              <a:rPr sz="1500">
+                <a:solidFill>
+                  <a:srgbClr val="22282E"/>
+                </a:solidFill>
+              </a:rPr>
+              <a:t>•  Realiza confusión RS256→HS256 y explica por qué funciona.</a:t>
+            </a:r>
+          </a:p>
+          <a:p>
+            <a:pPr>
+              <a:spcAft>
+                <a:spcPts val="600"/>
+              </a:spcAft>
+            </a:pPr>
+            <a:r>
+              <a:rPr sz="1500">
+                <a:solidFill>
+                  <a:srgbClr val="22282E"/>
+                </a:solidFill>
+              </a:rPr>
+              <a:t>•  Crackea un secreto HMAC débil y forja un token admin.</a:t>
+            </a:r>
+          </a:p>
+          <a:p>
+            <a:pPr>
+              <a:spcAft>
+                <a:spcPts val="600"/>
+              </a:spcAft>
+            </a:pPr>
+            <a:r>
+              <a:rPr sz="1500">
+                <a:solidFill>
+                  <a:srgbClr val="22282E"/>
+                </a:solidFill>
+              </a:rPr>
+              <a:t>•  Analiza los claims exp/iss/aud y qué pasa si no se validan.</a:t>
+            </a:r>
+          </a:p>
+          <a:p>
+            <a:pPr>
+              <a:spcAft>
+                <a:spcPts val="600"/>
+              </a:spcAft>
+            </a:pPr>
+            <a:r>
+              <a:rPr sz="1500">
+                <a:solidFill>
+                  <a:srgbClr val="22282E"/>
+                </a:solidFill>
+              </a:rPr>
+              <a:t>•  Escribe la validación correcta de JWT en el lenguaje que prefieras.</a:t>
             </a:r>
           </a:p>
         </p:txBody>
@@ -3347,7 +3365,7 @@
                   <a:srgbClr val="0B3D2E"/>
                 </a:solidFill>
               </a:rPr>
-              <a:t>❓ Preguntas frecuentes</a:t>
+              <a:t>📝 Reto verificable</a:t>
             </a:r>
           </a:p>
         </p:txBody>
@@ -3385,82 +3403,22 @@
                   <a:srgbClr val="22282E"/>
                 </a:solidFill>
               </a:rPr>
-              <a:t>•  ❓ ¿JWT es inseguro?</a:t>
-            </a:r>
-          </a:p>
-          <a:p>
-            <a:pPr>
-              <a:spcAft>
-                <a:spcPts val="600"/>
-              </a:spcAft>
-            </a:pPr>
-            <a:r>
-              <a:rPr sz="1500">
-                <a:solidFill>
-                  <a:srgbClr val="22282E"/>
-                </a:solidFill>
-              </a:rPr>
-              <a:t>•  No por sí mismo. Los fallos vienen de implementaciones que no verifican bien la firma o el algoritmo.</a:t>
-            </a:r>
-          </a:p>
-          <a:p>
-            <a:pPr>
-              <a:spcAft>
-                <a:spcPts val="600"/>
-              </a:spcAft>
-            </a:pPr>
-            <a:r>
-              <a:rPr sz="1500">
-                <a:solidFill>
-                  <a:srgbClr val="22282E"/>
-                </a:solidFill>
-              </a:rPr>
-              <a:t>•  ❓ ¿Puedo revocar un JWT?</a:t>
-            </a:r>
-          </a:p>
-          <a:p>
-            <a:pPr>
-              <a:spcAft>
-                <a:spcPts val="600"/>
-              </a:spcAft>
-            </a:pPr>
-            <a:r>
-              <a:rPr sz="1500">
-                <a:solidFill>
-                  <a:srgbClr val="22282E"/>
-                </a:solidFill>
-              </a:rPr>
-              <a:t>•  No fácilmente por ser stateless. Se usan expiraciones cortas y listas de revocación o rotación de claves.</a:t>
-            </a:r>
-          </a:p>
-          <a:p>
-            <a:pPr>
-              <a:spcAft>
-                <a:spcPts val="600"/>
-              </a:spcAft>
-            </a:pPr>
-            <a:r>
-              <a:rPr sz="1500">
-                <a:solidFill>
-                  <a:srgbClr val="22282E"/>
-                </a:solidFill>
-              </a:rPr>
-              <a:t>•  ❓ ¿Guardo el JWT en localStorage o cookie?</a:t>
-            </a:r>
-          </a:p>
-          <a:p>
-            <a:pPr>
-              <a:spcAft>
-                <a:spcPts val="600"/>
-              </a:spcAft>
-            </a:pPr>
-            <a:r>
-              <a:rPr sz="1500">
-                <a:solidFill>
-                  <a:srgbClr val="22282E"/>
-                </a:solidFill>
-              </a:rPr>
-              <a:t>•  Cookie HttpOnly reduce el robo vía XSS; localStorage es accesible por JS. Cada opción tiene trade-offs de CSRF/XSS.</a:t>
+              <a:t>•  Resuelve un lab de JWT de PortSwigger (alg:none, clave débil o confusión de algoritmos) y escala a administrador forjando un token.</a:t>
+            </a:r>
+          </a:p>
+          <a:p>
+            <a:pPr>
+              <a:spcAft>
+                <a:spcPts val="600"/>
+              </a:spcAft>
+            </a:pPr>
+            <a:r>
+              <a:rPr sz="1500">
+                <a:solidFill>
+                  <a:srgbClr val="22282E"/>
+                </a:solidFill>
+              </a:rPr>
+              <a:t>•  Criterio de aceptación: el lab queda resuelto, entregas el token forjado, el ataque usado y la corrección (verificar firma, fijar el algoritmo esperado, secreto fuerte).</a:t>
             </a:r>
           </a:p>
         </p:txBody>
@@ -3511,7 +3469,7 @@
                   <a:srgbClr val="0B3D2E"/>
                 </a:solidFill>
               </a:rPr>
-              <a:t>🔗 Referencias</a:t>
+              <a:t>⚠️ Errores comunes</a:t>
             </a:r>
           </a:p>
         </p:txBody>
@@ -3549,6 +3507,319 @@
                   <a:srgbClr val="22282E"/>
                 </a:solidFill>
               </a:rPr>
+              <a:t>•  alg:none rechazado — Servidor valida el algoritmo; prueba otro ataque</a:t>
+            </a:r>
+          </a:p>
+          <a:p>
+            <a:pPr>
+              <a:spcAft>
+                <a:spcPts val="600"/>
+              </a:spcAft>
+            </a:pPr>
+            <a:r>
+              <a:rPr sz="1500">
+                <a:solidFill>
+                  <a:srgbClr val="22282E"/>
+                </a:solidFill>
+              </a:rPr>
+              <a:t>•  Confusión no funciona — La librería fija el alg; documenta como fortaleza</a:t>
+            </a:r>
+          </a:p>
+          <a:p>
+            <a:pPr>
+              <a:spcAft>
+                <a:spcPts val="600"/>
+              </a:spcAft>
+            </a:pPr>
+            <a:r>
+              <a:rPr sz="1500">
+                <a:solidFill>
+                  <a:srgbClr val="22282E"/>
+                </a:solidFill>
+              </a:rPr>
+              <a:t>•  hashcat no crackea — Secreto fuerte; solo funciona con claves débiles</a:t>
+            </a:r>
+          </a:p>
+          <a:p>
+            <a:pPr>
+              <a:spcAft>
+                <a:spcPts val="600"/>
+              </a:spcAft>
+            </a:pPr>
+            <a:r>
+              <a:rPr sz="1500">
+                <a:solidFill>
+                  <a:srgbClr val="22282E"/>
+                </a:solidFill>
+              </a:rPr>
+              <a:t>•  Token modificado rechazado — La firma sí se verifica; revisa el vector</a:t>
+            </a:r>
+          </a:p>
+          <a:p>
+            <a:pPr>
+              <a:spcAft>
+                <a:spcPts val="600"/>
+              </a:spcAft>
+            </a:pPr>
+            <a:r>
+              <a:rPr sz="1500">
+                <a:solidFill>
+                  <a:srgbClr val="22282E"/>
+                </a:solidFill>
+              </a:rPr>
+              <a:t>•  kid no explotable — Se valida contra allowlist; correcto</a:t>
+            </a:r>
+          </a:p>
+        </p:txBody>
+      </p:sp>
+    </p:spTree>
+  </p:cSld>
+  <p:clrMapOvr>
+    <a:masterClrMapping/>
+  </p:clrMapOvr>
+</p:sld>
+</file>
+
+<file path=ppt/slides/slide13.xml><?xml version="1.0" encoding="utf-8"?>
+<p:sld xmlns:a="http://schemas.openxmlformats.org/drawingml/2006/main" xmlns:p="http://schemas.openxmlformats.org/presentationml/2006/main" xmlns:r="http://schemas.openxmlformats.org/officeDocument/2006/relationships">
+  <p:cSld>
+    <p:spTree>
+      <p:nvGrpSpPr>
+        <p:cNvPr id="1" name=""/>
+        <p:cNvGrpSpPr/>
+        <p:nvPr/>
+      </p:nvGrpSpPr>
+      <p:grpSpPr/>
+      <p:sp>
+        <p:nvSpPr>
+          <p:cNvPr id="2" name="TextBox 1"/>
+          <p:cNvSpPr txBox="1"/>
+          <p:nvPr/>
+        </p:nvSpPr>
+        <p:spPr>
+          <a:xfrm>
+            <a:off x="457200" y="320040"/>
+            <a:ext cx="8229600" cy="822960"/>
+          </a:xfrm>
+          <a:prstGeom prst="rect">
+            <a:avLst/>
+          </a:prstGeom>
+          <a:noFill/>
+        </p:spPr>
+        <p:txBody>
+          <a:bodyPr wrap="square">
+            <a:spAutoFit/>
+          </a:bodyPr>
+          <a:lstStyle/>
+          <a:p>
+            <a:r>
+              <a:rPr sz="2600" b="1">
+                <a:solidFill>
+                  <a:srgbClr val="0B3D2E"/>
+                </a:solidFill>
+              </a:rPr>
+              <a:t>❓ Preguntas frecuentes</a:t>
+            </a:r>
+          </a:p>
+        </p:txBody>
+      </p:sp>
+      <p:sp>
+        <p:nvSpPr>
+          <p:cNvPr id="3" name="TextBox 2"/>
+          <p:cNvSpPr txBox="1"/>
+          <p:nvPr/>
+        </p:nvSpPr>
+        <p:spPr>
+          <a:xfrm>
+            <a:off x="457200" y="1280160"/>
+            <a:ext cx="8229600" cy="4937760"/>
+          </a:xfrm>
+          <a:prstGeom prst="rect">
+            <a:avLst/>
+          </a:prstGeom>
+          <a:noFill/>
+        </p:spPr>
+        <p:txBody>
+          <a:bodyPr wrap="square">
+            <a:spAutoFit/>
+          </a:bodyPr>
+          <a:lstStyle/>
+          <a:p>
+            <a:pPr>
+              <a:spcAft>
+                <a:spcPts val="600"/>
+              </a:spcAft>
+            </a:pPr>
+            <a:r>
+              <a:rPr sz="1500">
+                <a:solidFill>
+                  <a:srgbClr val="22282E"/>
+                </a:solidFill>
+              </a:rPr>
+              <a:t>•  ❓ ¿JWT es inseguro?</a:t>
+            </a:r>
+          </a:p>
+          <a:p>
+            <a:pPr>
+              <a:spcAft>
+                <a:spcPts val="600"/>
+              </a:spcAft>
+            </a:pPr>
+            <a:r>
+              <a:rPr sz="1500">
+                <a:solidFill>
+                  <a:srgbClr val="22282E"/>
+                </a:solidFill>
+              </a:rPr>
+              <a:t>•  No por sí mismo. Los fallos vienen de implementaciones que no verifican bien la firma o el algoritmo.</a:t>
+            </a:r>
+          </a:p>
+          <a:p>
+            <a:pPr>
+              <a:spcAft>
+                <a:spcPts val="600"/>
+              </a:spcAft>
+            </a:pPr>
+            <a:r>
+              <a:rPr sz="1500">
+                <a:solidFill>
+                  <a:srgbClr val="22282E"/>
+                </a:solidFill>
+              </a:rPr>
+              <a:t>•  ❓ ¿Puedo revocar un JWT?</a:t>
+            </a:r>
+          </a:p>
+          <a:p>
+            <a:pPr>
+              <a:spcAft>
+                <a:spcPts val="600"/>
+              </a:spcAft>
+            </a:pPr>
+            <a:r>
+              <a:rPr sz="1500">
+                <a:solidFill>
+                  <a:srgbClr val="22282E"/>
+                </a:solidFill>
+              </a:rPr>
+              <a:t>•  No fácilmente por ser stateless. Se usan expiraciones cortas y listas de revocación o rotación de claves.</a:t>
+            </a:r>
+          </a:p>
+          <a:p>
+            <a:pPr>
+              <a:spcAft>
+                <a:spcPts val="600"/>
+              </a:spcAft>
+            </a:pPr>
+            <a:r>
+              <a:rPr sz="1500">
+                <a:solidFill>
+                  <a:srgbClr val="22282E"/>
+                </a:solidFill>
+              </a:rPr>
+              <a:t>•  ❓ ¿Guardo el JWT en localStorage o cookie?</a:t>
+            </a:r>
+          </a:p>
+          <a:p>
+            <a:pPr>
+              <a:spcAft>
+                <a:spcPts val="600"/>
+              </a:spcAft>
+            </a:pPr>
+            <a:r>
+              <a:rPr sz="1500">
+                <a:solidFill>
+                  <a:srgbClr val="22282E"/>
+                </a:solidFill>
+              </a:rPr>
+              <a:t>•  Cookie HttpOnly reduce el robo vía XSS; localStorage es accesible por JS. Cada opción tiene trade-offs de CSRF/XSS.</a:t>
+            </a:r>
+          </a:p>
+        </p:txBody>
+      </p:sp>
+    </p:spTree>
+  </p:cSld>
+  <p:clrMapOvr>
+    <a:masterClrMapping/>
+  </p:clrMapOvr>
+</p:sld>
+</file>
+
+<file path=ppt/slides/slide14.xml><?xml version="1.0" encoding="utf-8"?>
+<p:sld xmlns:a="http://schemas.openxmlformats.org/drawingml/2006/main" xmlns:p="http://schemas.openxmlformats.org/presentationml/2006/main" xmlns:r="http://schemas.openxmlformats.org/officeDocument/2006/relationships">
+  <p:cSld>
+    <p:spTree>
+      <p:nvGrpSpPr>
+        <p:cNvPr id="1" name=""/>
+        <p:cNvGrpSpPr/>
+        <p:nvPr/>
+      </p:nvGrpSpPr>
+      <p:grpSpPr/>
+      <p:sp>
+        <p:nvSpPr>
+          <p:cNvPr id="2" name="TextBox 1"/>
+          <p:cNvSpPr txBox="1"/>
+          <p:nvPr/>
+        </p:nvSpPr>
+        <p:spPr>
+          <a:xfrm>
+            <a:off x="457200" y="320040"/>
+            <a:ext cx="8229600" cy="822960"/>
+          </a:xfrm>
+          <a:prstGeom prst="rect">
+            <a:avLst/>
+          </a:prstGeom>
+          <a:noFill/>
+        </p:spPr>
+        <p:txBody>
+          <a:bodyPr wrap="square">
+            <a:spAutoFit/>
+          </a:bodyPr>
+          <a:lstStyle/>
+          <a:p>
+            <a:r>
+              <a:rPr sz="2600" b="1">
+                <a:solidFill>
+                  <a:srgbClr val="0B3D2E"/>
+                </a:solidFill>
+              </a:rPr>
+              <a:t>🔗 Referencias</a:t>
+            </a:r>
+          </a:p>
+        </p:txBody>
+      </p:sp>
+      <p:sp>
+        <p:nvSpPr>
+          <p:cNvPr id="3" name="TextBox 2"/>
+          <p:cNvSpPr txBox="1"/>
+          <p:nvPr/>
+        </p:nvSpPr>
+        <p:spPr>
+          <a:xfrm>
+            <a:off x="457200" y="1280160"/>
+            <a:ext cx="8229600" cy="4937760"/>
+          </a:xfrm>
+          <a:prstGeom prst="rect">
+            <a:avLst/>
+          </a:prstGeom>
+          <a:noFill/>
+        </p:spPr>
+        <p:txBody>
+          <a:bodyPr wrap="square">
+            <a:spAutoFit/>
+          </a:bodyPr>
+          <a:lstStyle/>
+          <a:p>
+            <a:pPr>
+              <a:spcAft>
+                <a:spcPts val="600"/>
+              </a:spcAft>
+            </a:pPr>
+            <a:r>
+              <a:rPr sz="1500">
+                <a:solidFill>
+                  <a:srgbClr val="22282E"/>
+                </a:solidFill>
+              </a:rPr>
               <a:t>•  Li, Bug Bounty Bootcamp, sección de JWT.</a:t>
             </a:r>
           </a:p>
@@ -3599,6 +3870,81 @@
           </a:p>
         </p:txBody>
       </p:sp>
+    </p:spTree>
+  </p:cSld>
+  <p:clrMapOvr>
+    <a:masterClrMapping/>
+  </p:clrMapOvr>
+</p:sld>
+</file>
+
+<file path=ppt/slides/slide15.xml><?xml version="1.0" encoding="utf-8"?>
+<p:sld xmlns:a="http://schemas.openxmlformats.org/drawingml/2006/main" xmlns:p="http://schemas.openxmlformats.org/presentationml/2006/main" xmlns:r="http://schemas.openxmlformats.org/officeDocument/2006/relationships">
+  <p:cSld>
+    <p:spTree>
+      <p:nvGrpSpPr>
+        <p:cNvPr id="1" name=""/>
+        <p:cNvGrpSpPr/>
+        <p:nvPr/>
+      </p:nvGrpSpPr>
+      <p:grpSpPr/>
+      <p:sp>
+        <p:nvSpPr>
+          <p:cNvPr id="2" name="TextBox 1"/>
+          <p:cNvSpPr txBox="1"/>
+          <p:nvPr/>
+        </p:nvSpPr>
+        <p:spPr>
+          <a:xfrm>
+            <a:off x="457200" y="274320"/>
+            <a:ext cx="8229600" cy="640080"/>
+          </a:xfrm>
+          <a:prstGeom prst="rect">
+            <a:avLst/>
+          </a:prstGeom>
+          <a:noFill/>
+        </p:spPr>
+        <p:txBody>
+          <a:bodyPr wrap="square">
+            <a:spAutoFit/>
+          </a:bodyPr>
+          <a:lstStyle/>
+          <a:p>
+            <a:r>
+              <a:rPr sz="2200" b="1">
+                <a:solidFill>
+                  <a:srgbClr val="0B3D2E"/>
+                </a:solidFill>
+              </a:rPr>
+              <a:t>Diagrama de la clase</a:t>
+            </a:r>
+          </a:p>
+        </p:txBody>
+      </p:sp>
+      <p:pic>
+        <p:nvPicPr>
+          <p:cNvPr id="3" name="Picture 2" descr="bc5cabbc13a2a511.png"/>
+          <p:cNvPicPr>
+            <a:picLocks noChangeAspect="1"/>
+          </p:cNvPicPr>
+          <p:nvPr/>
+        </p:nvPicPr>
+        <p:blipFill>
+          <a:blip r:embed="rId2"/>
+          <a:stretch>
+            <a:fillRect/>
+          </a:stretch>
+        </p:blipFill>
+        <p:spPr>
+          <a:xfrm>
+            <a:off x="560934" y="1097280"/>
+            <a:ext cx="8022131" cy="5303520"/>
+          </a:xfrm>
+          <a:prstGeom prst="rect">
+            <a:avLst/>
+          </a:prstGeom>
+        </p:spPr>
+      </p:pic>
     </p:spTree>
   </p:cSld>
   <p:clrMapOvr>
@@ -3683,7 +4029,7 @@
                   <a:srgbClr val="22282E"/>
                 </a:solidFill>
               </a:rPr>
-              <a:t>•  Auditar la seguridad de los JSON Web Tokens (JWT), hoy omnipresentes en APIs y SPAs. Aprenderás a decodificarlos, detectar implementaciones inseguras y explotar fallos clásicos: alg:none, confusión de algoritmos, claves débiles y falta de verificación de firma.</a:t>
+              <a:t>•  Auditar la seguridad de los JSON Web Tokens (JWT), hoy omnipresentes en APIs y SPAs. Aprenderás a decodificarlos, detectar implementaciones inseguras y explotar fallos clásicos: alg:none, confusión…</a:t>
             </a:r>
           </a:p>
         </p:txBody>
@@ -4077,7 +4423,7 @@
                   <a:srgbClr val="0B3D2E"/>
                 </a:solidFill>
               </a:rPr>
-              <a:t>📖 Definiciones y características</a:t>
+              <a:t>🧠 Explicación en profundidad</a:t>
             </a:r>
           </a:p>
         </p:txBody>
@@ -4115,82 +4461,97 @@
                   <a:srgbClr val="22282E"/>
                 </a:solidFill>
               </a:rPr>
-              <a:t>•  JWT: token compacto con header, payload y firma en Base64URL. Característica: autocontenido y stateless.</a:t>
-            </a:r>
-          </a:p>
-          <a:p>
-            <a:pPr>
-              <a:spcAft>
-                <a:spcPts val="600"/>
-              </a:spcAft>
-            </a:pPr>
-            <a:r>
-              <a:rPr sz="1500">
-                <a:solidFill>
-                  <a:srgbClr val="22282E"/>
-                </a:solidFill>
-              </a:rPr>
-              <a:t>•  alg:none: algoritmo que indica "sin firma". Característica: si el servidor lo acepta, cualquiera forja tokens.</a:t>
-            </a:r>
-          </a:p>
-          <a:p>
-            <a:pPr>
-              <a:spcAft>
-                <a:spcPts val="600"/>
-              </a:spcAft>
-            </a:pPr>
-            <a:r>
-              <a:rPr sz="1500">
-                <a:solidFill>
-                  <a:srgbClr val="22282E"/>
-                </a:solidFill>
-              </a:rPr>
-              <a:t>•  Confusión de algoritmos: hacer que el servidor verifique un RS256 como HS256 usando la clave pública como secreto HMAC. Característica: explota validación laxa del alg.</a:t>
-            </a:r>
-          </a:p>
-          <a:p>
-            <a:pPr>
-              <a:spcAft>
-                <a:spcPts val="600"/>
-              </a:spcAft>
-            </a:pPr>
-            <a:r>
-              <a:rPr sz="1500">
-                <a:solidFill>
-                  <a:srgbClr val="22282E"/>
-                </a:solidFill>
-              </a:rPr>
-              <a:t>•  kid (key id): cabecera que indica qué clave usar. Característica: inyectable (path traversal, SQLi) si no se valida.</a:t>
-            </a:r>
-          </a:p>
-          <a:p>
-            <a:pPr>
-              <a:spcAft>
-                <a:spcPts val="600"/>
-              </a:spcAft>
-            </a:pPr>
-            <a:r>
-              <a:rPr sz="1500">
-                <a:solidFill>
-                  <a:srgbClr val="22282E"/>
-                </a:solidFill>
-              </a:rPr>
-              <a:t>•  Claim exp: expiración del token. Característica: si no se valida, los tokens no caducan.</a:t>
-            </a:r>
-          </a:p>
-          <a:p>
-            <a:pPr>
-              <a:spcAft>
-                <a:spcPts val="600"/>
-              </a:spcAft>
-            </a:pPr>
-            <a:r>
-              <a:rPr sz="1500">
-                <a:solidFill>
-                  <a:srgbClr val="22282E"/>
-                </a:solidFill>
-              </a:rPr>
-              <a:t>•  Secreto HMAC: clave compartida en HS256. Característica: si es débil, se crackea offline.</a:t>
+              <a:t>•  Un JWT (JSON Web Token) es una forma de sesión sin estado en el servidor: en lugar de guardar</a:t>
+            </a:r>
+          </a:p>
+          <a:p>
+            <a:pPr>
+              <a:spcAft>
+                <a:spcPts val="600"/>
+              </a:spcAft>
+            </a:pPr>
+            <a:r>
+              <a:rPr sz="1500">
+                <a:solidFill>
+                  <a:srgbClr val="22282E"/>
+                </a:solidFill>
+              </a:rPr>
+              <a:t>•  un session ID que apunta a datos en el servidor (clase 102), el token contiene los datos</a:t>
+            </a:r>
+          </a:p>
+          <a:p>
+            <a:pPr>
+              <a:spcAft>
+                <a:spcPts val="600"/>
+              </a:spcAft>
+            </a:pPr>
+            <a:r>
+              <a:rPr sz="1500">
+                <a:solidFill>
+                  <a:srgbClr val="22282E"/>
+                </a:solidFill>
+              </a:rPr>
+              <a:t>•  —quién eres, tus permisos, cuándo expira— y una firma que garantiza que no se han manipulado. Se</a:t>
+            </a:r>
+          </a:p>
+          <a:p>
+            <a:pPr>
+              <a:spcAft>
+                <a:spcPts val="600"/>
+              </a:spcAft>
+            </a:pPr>
+            <a:r>
+              <a:rPr sz="1500">
+                <a:solidFill>
+                  <a:srgbClr val="22282E"/>
+                </a:solidFill>
+              </a:rPr>
+              <a:t>•  compone de tres partes separadas por puntos y codificadas en Base64URL: el header (qué algoritmo</a:t>
+            </a:r>
+          </a:p>
+          <a:p>
+            <a:pPr>
+              <a:spcAft>
+                <a:spcPts val="600"/>
+              </a:spcAft>
+            </a:pPr>
+            <a:r>
+              <a:rPr sz="1500">
+                <a:solidFill>
+                  <a:srgbClr val="22282E"/>
+                </a:solidFill>
+              </a:rPr>
+              <a:t>•  firma), el payload (los claims: sub, exp, iss, aud, roles) y la firma. El punto</a:t>
+            </a:r>
+          </a:p>
+          <a:p>
+            <a:pPr>
+              <a:spcAft>
+                <a:spcPts val="600"/>
+              </a:spcAft>
+            </a:pPr>
+            <a:r>
+              <a:rPr sz="1500">
+                <a:solidFill>
+                  <a:srgbClr val="22282E"/>
+                </a:solidFill>
+              </a:rPr>
+              <a:t>•  crítico que hay que grabar desde el principio: el payload NO está cifrado, solo codificado —</a:t>
+            </a:r>
+          </a:p>
+          <a:p>
+            <a:pPr>
+              <a:spcAft>
+                <a:spcPts val="600"/>
+              </a:spcAft>
+            </a:pPr>
+            <a:r>
+              <a:rPr sz="1500">
+                <a:solidFill>
+                  <a:srgbClr val="22282E"/>
+                </a:solidFill>
+              </a:rPr>
+              <a:t>•  cualquiera lo lee decodificando el Base64—; lo único que la firma garantiza es la integridad, no</a:t>
             </a:r>
           </a:p>
         </p:txBody>
@@ -4241,7 +4602,7 @@
                   <a:srgbClr val="0B3D2E"/>
                 </a:solidFill>
               </a:rPr>
-              <a:t>🧰 Herramientas y preparación</a:t>
+              <a:t>📖 Definiciones y características</a:t>
             </a:r>
           </a:p>
         </p:txBody>
@@ -4279,67 +4640,82 @@
                   <a:srgbClr val="22282E"/>
                 </a:solidFill>
               </a:rPr>
-              <a:t>•  jwt.io (decodificar/inspeccionar) y jwttool.</a:t>
-            </a:r>
-          </a:p>
-          <a:p>
-            <a:pPr>
-              <a:spcAft>
-                <a:spcPts val="600"/>
-              </a:spcAft>
-            </a:pPr>
-            <a:r>
-              <a:rPr sz="1500">
-                <a:solidFill>
-                  <a:srgbClr val="22282E"/>
-                </a:solidFill>
-              </a:rPr>
-              <a:t>•  Burp con la extensión JWT Editor.</a:t>
-            </a:r>
-          </a:p>
-          <a:p>
-            <a:pPr>
-              <a:spcAft>
-                <a:spcPts val="600"/>
-              </a:spcAft>
-            </a:pPr>
-            <a:r>
-              <a:rPr sz="1500">
-                <a:solidFill>
-                  <a:srgbClr val="22282E"/>
-                </a:solidFill>
-              </a:rPr>
-              <a:t>•  hashcat o John the Ripper para crackear secretos.</a:t>
-            </a:r>
-          </a:p>
-          <a:p>
-            <a:pPr>
-              <a:spcAft>
-                <a:spcPts val="600"/>
-              </a:spcAft>
-            </a:pPr>
-            <a:r>
-              <a:rPr sz="1500">
-                <a:solidFill>
-                  <a:srgbClr val="22282E"/>
-                </a:solidFill>
-              </a:rPr>
-              <a:t>•  PortSwigger labs de JWT.</a:t>
-            </a:r>
-          </a:p>
-          <a:p>
-            <a:pPr>
-              <a:spcAft>
-                <a:spcPts val="600"/>
-              </a:spcAft>
-            </a:pPr>
-            <a:r>
-              <a:rPr sz="1500">
-                <a:solidFill>
-                  <a:srgbClr val="22282E"/>
-                </a:solidFill>
-              </a:rPr>
-              <a:t>•  git clone https://github.com/ticarpi/jwttool &amp;&amp; cd jwttool &amp;&amp; pip install -r requirements.txt</a:t>
+              <a:t>•  JWT: token compacto con header, payload y firma en Base64URL. Característica: autocontenido y stateless.</a:t>
+            </a:r>
+          </a:p>
+          <a:p>
+            <a:pPr>
+              <a:spcAft>
+                <a:spcPts val="600"/>
+              </a:spcAft>
+            </a:pPr>
+            <a:r>
+              <a:rPr sz="1500">
+                <a:solidFill>
+                  <a:srgbClr val="22282E"/>
+                </a:solidFill>
+              </a:rPr>
+              <a:t>•  alg:none: algoritmo que indica "sin firma". Característica: si el servidor lo acepta, cualquiera forja tokens.</a:t>
+            </a:r>
+          </a:p>
+          <a:p>
+            <a:pPr>
+              <a:spcAft>
+                <a:spcPts val="600"/>
+              </a:spcAft>
+            </a:pPr>
+            <a:r>
+              <a:rPr sz="1500">
+                <a:solidFill>
+                  <a:srgbClr val="22282E"/>
+                </a:solidFill>
+              </a:rPr>
+              <a:t>•  Confusión de algoritmos: hacer que el servidor verifique un RS256 como HS256 usando la clave pública como secreto HMAC. Característica: explota validación laxa del alg.</a:t>
+            </a:r>
+          </a:p>
+          <a:p>
+            <a:pPr>
+              <a:spcAft>
+                <a:spcPts val="600"/>
+              </a:spcAft>
+            </a:pPr>
+            <a:r>
+              <a:rPr sz="1500">
+                <a:solidFill>
+                  <a:srgbClr val="22282E"/>
+                </a:solidFill>
+              </a:rPr>
+              <a:t>•  kid (key id): cabecera que indica qué clave usar. Característica: inyectable (path traversal, SQLi) si no se valida.</a:t>
+            </a:r>
+          </a:p>
+          <a:p>
+            <a:pPr>
+              <a:spcAft>
+                <a:spcPts val="600"/>
+              </a:spcAft>
+            </a:pPr>
+            <a:r>
+              <a:rPr sz="1500">
+                <a:solidFill>
+                  <a:srgbClr val="22282E"/>
+                </a:solidFill>
+              </a:rPr>
+              <a:t>•  Claim exp: expiración del token. Característica: si no se valida, los tokens no caducan.</a:t>
+            </a:r>
+          </a:p>
+          <a:p>
+            <a:pPr>
+              <a:spcAft>
+                <a:spcPts val="600"/>
+              </a:spcAft>
+            </a:pPr>
+            <a:r>
+              <a:rPr sz="1500">
+                <a:solidFill>
+                  <a:srgbClr val="22282E"/>
+                </a:solidFill>
+              </a:rPr>
+              <a:t>•  Secreto HMAC: clave compartida en HS256. Característica: si es débil, se crackea offline.</a:t>
             </a:r>
           </a:p>
         </p:txBody>
@@ -4390,7 +4766,7 @@
                   <a:srgbClr val="0B3D2E"/>
                 </a:solidFill>
               </a:rPr>
-              <a:t>🧪 Laboratorio guiado</a:t>
+              <a:t>📔 Glosario</a:t>
             </a:r>
           </a:p>
         </p:txBody>
@@ -4428,97 +4804,97 @@
                   <a:srgbClr val="22282E"/>
                 </a:solidFill>
               </a:rPr>
-              <a:t>•  Captura un JWT y decodifícalo con jwt.io o jwttool para ver header y claims.</a:t>
-            </a:r>
-          </a:p>
-          <a:p>
-            <a:pPr>
-              <a:spcAft>
-                <a:spcPts val="600"/>
-              </a:spcAft>
-            </a:pPr>
-            <a:r>
-              <a:rPr sz="1500">
-                <a:solidFill>
-                  <a:srgbClr val="22282E"/>
-                </a:solidFill>
-              </a:rPr>
-              <a:t>•  Prueba el ataque alg:none: cambia "alg":"none", elimina la firma y modifica un claim (p. ej. role: admin).</a:t>
-            </a:r>
-          </a:p>
-          <a:p>
-            <a:pPr>
-              <a:spcAft>
-                <a:spcPts val="600"/>
-              </a:spcAft>
-            </a:pPr>
-            <a:r>
-              <a:rPr sz="1500">
-                <a:solidFill>
-                  <a:srgbClr val="22282E"/>
-                </a:solidFill>
-              </a:rPr>
-              <a:t>•  Si usa RS256, intenta confusión de algoritmos: firma un HS256 usando la clave pública del servidor como secreto.</a:t>
-            </a:r>
-          </a:p>
-          <a:p>
-            <a:pPr>
-              <a:spcAft>
-                <a:spcPts val="600"/>
-              </a:spcAft>
-            </a:pPr>
-            <a:r>
-              <a:rPr sz="1500">
-                <a:solidFill>
-                  <a:srgbClr val="22282E"/>
-                </a:solidFill>
-              </a:rPr>
-              <a:t>•  Si es HS256, extrae el token y crackea el secreto con hashcat:</a:t>
-            </a:r>
-          </a:p>
-          <a:p>
-            <a:pPr>
-              <a:spcAft>
-                <a:spcPts val="600"/>
-              </a:spcAft>
-            </a:pPr>
-            <a:r>
-              <a:rPr sz="1500">
-                <a:solidFill>
-                  <a:srgbClr val="22282E"/>
-                </a:solidFill>
-              </a:rPr>
-              <a:t>•  hashcat -m 16500 token.txt wordlist.txt</a:t>
-            </a:r>
-          </a:p>
-          <a:p>
-            <a:pPr>
-              <a:spcAft>
-                <a:spcPts val="600"/>
-              </a:spcAft>
-            </a:pPr>
-            <a:r>
-              <a:rPr sz="1500">
-                <a:solidFill>
-                  <a:srgbClr val="22282E"/>
-                </a:solidFill>
-              </a:rPr>
-              <a:t>•  Con el secreto, forja un token con privilegios elevados y úsalo.</a:t>
-            </a:r>
-          </a:p>
-          <a:p>
-            <a:pPr>
-              <a:spcAft>
-                <a:spcPts val="600"/>
-              </a:spcAft>
-            </a:pPr>
-            <a:r>
-              <a:rPr sz="1500">
-                <a:solidFill>
-                  <a:srgbClr val="22282E"/>
-                </a:solidFill>
-              </a:rPr>
-              <a:t>•  Manipula el kid para apuntar a un archivo/valor controlado.</a:t>
+              <a:t>•  Término — Definición concisa</a:t>
+            </a:r>
+          </a:p>
+          <a:p>
+            <a:pPr>
+              <a:spcAft>
+                <a:spcPts val="600"/>
+              </a:spcAft>
+            </a:pPr>
+            <a:r>
+              <a:rPr sz="1500">
+                <a:solidFill>
+                  <a:srgbClr val="22282E"/>
+                </a:solidFill>
+              </a:rPr>
+              <a:t>•  JWT — Token que contiene sus datos y una firma; sesión sin estado</a:t>
+            </a:r>
+          </a:p>
+          <a:p>
+            <a:pPr>
+              <a:spcAft>
+                <a:spcPts val="600"/>
+              </a:spcAft>
+            </a:pPr>
+            <a:r>
+              <a:rPr sz="1500">
+                <a:solidFill>
+                  <a:srgbClr val="22282E"/>
+                </a:solidFill>
+              </a:rPr>
+              <a:t>•  Header / payload / firma — Las tres partes del JWT, en Base64URL</a:t>
+            </a:r>
+          </a:p>
+          <a:p>
+            <a:pPr>
+              <a:spcAft>
+                <a:spcPts val="600"/>
+              </a:spcAft>
+            </a:pPr>
+            <a:r>
+              <a:rPr sz="1500">
+                <a:solidFill>
+                  <a:srgbClr val="22282E"/>
+                </a:solidFill>
+              </a:rPr>
+              <a:t>•  Claim — Dato del payload: sub, exp, iss, aud, roles</a:t>
+            </a:r>
+          </a:p>
+          <a:p>
+            <a:pPr>
+              <a:spcAft>
+                <a:spcPts val="600"/>
+              </a:spcAft>
+            </a:pPr>
+            <a:r>
+              <a:rPr sz="1500">
+                <a:solidFill>
+                  <a:srgbClr val="22282E"/>
+                </a:solidFill>
+              </a:rPr>
+              <a:t>•  Payload no cifrado — Solo codificado; cualquiera lo lee</a:t>
+            </a:r>
+          </a:p>
+          <a:p>
+            <a:pPr>
+              <a:spcAft>
+                <a:spcPts val="600"/>
+              </a:spcAft>
+            </a:pPr>
+            <a:r>
+              <a:rPr sz="1500">
+                <a:solidFill>
+                  <a:srgbClr val="22282E"/>
+                </a:solidFill>
+              </a:rPr>
+              <a:t>•  Integridad, no confidencialidad — La firma protege de manipulación, no de lectura</a:t>
+            </a:r>
+          </a:p>
+          <a:p>
+            <a:pPr>
+              <a:spcAft>
+                <a:spcPts val="600"/>
+              </a:spcAft>
+            </a:pPr>
+            <a:r>
+              <a:rPr sz="1500">
+                <a:solidFill>
+                  <a:srgbClr val="22282E"/>
+                </a:solidFill>
+              </a:rPr>
+              <a:t>•  HS256 — Firma simétrica; el mismo secreto firma y verifica</a:t>
             </a:r>
           </a:p>
         </p:txBody>
@@ -4569,7 +4945,7 @@
                   <a:srgbClr val="0B3D2E"/>
                 </a:solidFill>
               </a:rPr>
-              <a:t>✍️ Ejercicios</a:t>
+              <a:t>🧰 Herramientas y preparación</a:t>
             </a:r>
           </a:p>
         </p:txBody>
@@ -4607,82 +4983,52 @@
                   <a:srgbClr val="22282E"/>
                 </a:solidFill>
               </a:rPr>
-              <a:t>•  Explica cada parte de un JWT y qué contiene el payload.</a:t>
-            </a:r>
-          </a:p>
-          <a:p>
-            <a:pPr>
-              <a:spcAft>
-                <a:spcPts val="600"/>
-              </a:spcAft>
-            </a:pPr>
-            <a:r>
-              <a:rPr sz="1500">
-                <a:solidFill>
-                  <a:srgbClr val="22282E"/>
-                </a:solidFill>
-              </a:rPr>
-              <a:t>•  Reproduce el ataque alg:none en un lab de PortSwigger.</a:t>
-            </a:r>
-          </a:p>
-          <a:p>
-            <a:pPr>
-              <a:spcAft>
-                <a:spcPts val="600"/>
-              </a:spcAft>
-            </a:pPr>
-            <a:r>
-              <a:rPr sz="1500">
-                <a:solidFill>
-                  <a:srgbClr val="22282E"/>
-                </a:solidFill>
-              </a:rPr>
-              <a:t>•  Realiza confusión RS256→HS256 y explica por qué funciona.</a:t>
-            </a:r>
-          </a:p>
-          <a:p>
-            <a:pPr>
-              <a:spcAft>
-                <a:spcPts val="600"/>
-              </a:spcAft>
-            </a:pPr>
-            <a:r>
-              <a:rPr sz="1500">
-                <a:solidFill>
-                  <a:srgbClr val="22282E"/>
-                </a:solidFill>
-              </a:rPr>
-              <a:t>•  Crackea un secreto HMAC débil y forja un token admin.</a:t>
-            </a:r>
-          </a:p>
-          <a:p>
-            <a:pPr>
-              <a:spcAft>
-                <a:spcPts val="600"/>
-              </a:spcAft>
-            </a:pPr>
-            <a:r>
-              <a:rPr sz="1500">
-                <a:solidFill>
-                  <a:srgbClr val="22282E"/>
-                </a:solidFill>
-              </a:rPr>
-              <a:t>•  Analiza los claims exp/iss/aud y qué pasa si no se validan.</a:t>
-            </a:r>
-          </a:p>
-          <a:p>
-            <a:pPr>
-              <a:spcAft>
-                <a:spcPts val="600"/>
-              </a:spcAft>
-            </a:pPr>
-            <a:r>
-              <a:rPr sz="1500">
-                <a:solidFill>
-                  <a:srgbClr val="22282E"/>
-                </a:solidFill>
-              </a:rPr>
-              <a:t>•  Escribe la validación correcta de JWT en el lenguaje que prefieras.</a:t>
+              <a:t>•  jwt.io (decodificar/inspeccionar) y jwttool.</a:t>
+            </a:r>
+          </a:p>
+          <a:p>
+            <a:pPr>
+              <a:spcAft>
+                <a:spcPts val="600"/>
+              </a:spcAft>
+            </a:pPr>
+            <a:r>
+              <a:rPr sz="1500">
+                <a:solidFill>
+                  <a:srgbClr val="22282E"/>
+                </a:solidFill>
+              </a:rPr>
+              <a:t>•  Burp con la extensión JWT Editor.</a:t>
+            </a:r>
+          </a:p>
+          <a:p>
+            <a:pPr>
+              <a:spcAft>
+                <a:spcPts val="600"/>
+              </a:spcAft>
+            </a:pPr>
+            <a:r>
+              <a:rPr sz="1500">
+                <a:solidFill>
+                  <a:srgbClr val="22282E"/>
+                </a:solidFill>
+              </a:rPr>
+              <a:t>•  hashcat o John the Ripper para crackear secretos.</a:t>
+            </a:r>
+          </a:p>
+          <a:p>
+            <a:pPr>
+              <a:spcAft>
+                <a:spcPts val="600"/>
+              </a:spcAft>
+            </a:pPr>
+            <a:r>
+              <a:rPr sz="1500">
+                <a:solidFill>
+                  <a:srgbClr val="22282E"/>
+                </a:solidFill>
+              </a:rPr>
+              <a:t>•  PortSwigger labs de JWT.</a:t>
             </a:r>
           </a:p>
         </p:txBody>
@@ -4733,7 +5079,7 @@
                   <a:srgbClr val="0B3D2E"/>
                 </a:solidFill>
               </a:rPr>
-              <a:t>📝 Reto verificable</a:t>
+              <a:t>🧪 Laboratorio guiado</a:t>
             </a:r>
           </a:p>
         </p:txBody>
@@ -4771,22 +5117,97 @@
                   <a:srgbClr val="22282E"/>
                 </a:solidFill>
               </a:rPr>
-              <a:t>•  Resuelve un lab de JWT de PortSwigger (alg:none, clave débil o confusión de algoritmos) y escala a administrador forjando un token.</a:t>
-            </a:r>
-          </a:p>
-          <a:p>
-            <a:pPr>
-              <a:spcAft>
-                <a:spcPts val="600"/>
-              </a:spcAft>
-            </a:pPr>
-            <a:r>
-              <a:rPr sz="1500">
-                <a:solidFill>
-                  <a:srgbClr val="22282E"/>
-                </a:solidFill>
-              </a:rPr>
-              <a:t>•  Criterio de aceptación: el lab queda resuelto, entregas el token forjado, el ataque usado y la corrección (verificar firma, fijar el algoritmo esperado, secreto fuerte).</a:t>
+              <a:t>•  Captura un JWT y decodifícalo con jwt.io o jwttool para ver header y claims.</a:t>
+            </a:r>
+          </a:p>
+          <a:p>
+            <a:pPr>
+              <a:spcAft>
+                <a:spcPts val="600"/>
+              </a:spcAft>
+            </a:pPr>
+            <a:r>
+              <a:rPr sz="1500">
+                <a:solidFill>
+                  <a:srgbClr val="22282E"/>
+                </a:solidFill>
+              </a:rPr>
+              <a:t>•  Prueba el ataque alg:none: cambia "alg":"none", elimina la firma y modifica un claim (p. ej. role: admin).</a:t>
+            </a:r>
+          </a:p>
+          <a:p>
+            <a:pPr>
+              <a:spcAft>
+                <a:spcPts val="600"/>
+              </a:spcAft>
+            </a:pPr>
+            <a:r>
+              <a:rPr sz="1500">
+                <a:solidFill>
+                  <a:srgbClr val="22282E"/>
+                </a:solidFill>
+              </a:rPr>
+              <a:t>•  Si usa RS256, intenta confusión de algoritmos: firma un HS256 usando la clave pública del servidor como secreto.</a:t>
+            </a:r>
+          </a:p>
+          <a:p>
+            <a:pPr>
+              <a:spcAft>
+                <a:spcPts val="600"/>
+              </a:spcAft>
+            </a:pPr>
+            <a:r>
+              <a:rPr sz="1500">
+                <a:solidFill>
+                  <a:srgbClr val="22282E"/>
+                </a:solidFill>
+              </a:rPr>
+              <a:t>•  Si es HS256, extrae el token y crackea el secreto con hashcat:</a:t>
+            </a:r>
+          </a:p>
+          <a:p>
+            <a:pPr>
+              <a:spcAft>
+                <a:spcPts val="600"/>
+              </a:spcAft>
+            </a:pPr>
+            <a:r>
+              <a:rPr sz="1500">
+                <a:solidFill>
+                  <a:srgbClr val="22282E"/>
+                </a:solidFill>
+              </a:rPr>
+              <a:t>•  Con el secreto, forja un token con privilegios elevados y úsalo.</a:t>
+            </a:r>
+          </a:p>
+          <a:p>
+            <a:pPr>
+              <a:spcAft>
+                <a:spcPts val="600"/>
+              </a:spcAft>
+            </a:pPr>
+            <a:r>
+              <a:rPr sz="1500">
+                <a:solidFill>
+                  <a:srgbClr val="22282E"/>
+                </a:solidFill>
+              </a:rPr>
+              <a:t>•  Manipula el kid para apuntar a un archivo/valor controlado.</a:t>
+            </a:r>
+          </a:p>
+          <a:p>
+            <a:pPr>
+              <a:spcAft>
+                <a:spcPts val="600"/>
+              </a:spcAft>
+            </a:pPr>
+            <a:r>
+              <a:rPr sz="1500">
+                <a:solidFill>
+                  <a:srgbClr val="22282E"/>
+                </a:solidFill>
+              </a:rPr>
+              <a:t>•  Verifica el manejo de exp: reusa un token caducado.</a:t>
             </a:r>
           </a:p>
         </p:txBody>
